--- a/media/resources/files/Onduktar_Akcha_Bolup_Toloo_menen_KatanyTap_kdM80kW.pptx
+++ b/media/resources/files/Onduktar_Akcha_Bolup_Toloo_menen_KatanyTap_kdM80kW.pptx
@@ -6280,7 +6280,7 @@
                 <a:ea typeface="+mn-ea"/>
                 <a:cs typeface="+mn-cs"/>
               </a:rPr>
-              <a:t>Турдуу пикирлер учун ыраазычылык билдиребиз.</a:t>
+              <a:t>Түрдүү пикирлер үчүн ыраазычылык билдиребиз.</a:t>
             </a:r>
           </a:p>
           <a:p>

--- a/media/resources/files/Onduktar_Akcha_Bolup_Toloo_menen_KatanyTap_kdM80kW.pptx
+++ b/media/resources/files/Onduktar_Akcha_Bolup_Toloo_menen_KatanyTap_kdM80kW.pptx
@@ -3630,7 +3630,7 @@
                 </a:solidFill>
                 <a:latin typeface="Calibri" panose="020F0502020204030204"/>
               </a:rPr>
-              <a:t>C</a:t>
+              <a:t>С</a:t>
             </a:r>
             <a:r>
               <a:rPr kumimoji="0" lang="ru-RU" sz="2800" b="0" i="0" u="none" strike="noStrike" kern="1200" cap="none" spc="0" normalizeH="0" baseline="0" noProof="0" dirty="0">
